--- a/Week-2/Day-1/Azure_Data_Engineering_Modules_10_13.pptx
+++ b/Week-2/Day-1/Azure_Data_Engineering_Modules_10_13.pptx
@@ -9326,7 +9326,7 @@
           <a:p>
             <a:fld id="{5BCAD085-E8A6-8845-BD4E-CB4CCA059FC4}" type="datetimeFigureOut">
               <a:rPr lang="en-US" smtClean="0"/>
-              <a:t>4/5/2026</a:t>
+              <a:t>4/6/2026</a:t>
             </a:fld>
             <a:endParaRPr lang="en-US"/>
           </a:p>
@@ -9533,7 +9533,7 @@
           <a:p>
             <a:fld id="{5BCAD085-E8A6-8845-BD4E-CB4CCA059FC4}" type="datetimeFigureOut">
               <a:rPr lang="en-US" smtClean="0"/>
-              <a:t>4/5/2026</a:t>
+              <a:t>4/6/2026</a:t>
             </a:fld>
             <a:endParaRPr lang="en-US"/>
           </a:p>
@@ -9713,7 +9713,7 @@
           <a:p>
             <a:fld id="{5BCAD085-E8A6-8845-BD4E-CB4CCA059FC4}" type="datetimeFigureOut">
               <a:rPr lang="en-US" smtClean="0"/>
-              <a:t>4/5/2026</a:t>
+              <a:t>4/6/2026</a:t>
             </a:fld>
             <a:endParaRPr lang="en-US"/>
           </a:p>
@@ -9918,7 +9918,7 @@
           <a:p>
             <a:fld id="{5BCAD085-E8A6-8845-BD4E-CB4CCA059FC4}" type="datetimeFigureOut">
               <a:rPr lang="en-US" smtClean="0"/>
-              <a:t>4/5/2026</a:t>
+              <a:t>4/6/2026</a:t>
             </a:fld>
             <a:endParaRPr lang="en-US"/>
           </a:p>
@@ -16656,7 +16656,7 @@
           <a:p>
             <a:fld id="{5BCAD085-E8A6-8845-BD4E-CB4CCA059FC4}" type="datetimeFigureOut">
               <a:rPr lang="en-US" smtClean="0"/>
-              <a:t>4/5/2026</a:t>
+              <a:t>4/6/2026</a:t>
             </a:fld>
             <a:endParaRPr lang="en-US"/>
           </a:p>
@@ -16930,7 +16930,7 @@
           <a:p>
             <a:fld id="{5BCAD085-E8A6-8845-BD4E-CB4CCA059FC4}" type="datetimeFigureOut">
               <a:rPr lang="en-US" smtClean="0"/>
-              <a:t>4/5/2026</a:t>
+              <a:t>4/6/2026</a:t>
             </a:fld>
             <a:endParaRPr lang="en-US"/>
           </a:p>
@@ -17333,7 +17333,7 @@
           <a:p>
             <a:fld id="{5BCAD085-E8A6-8845-BD4E-CB4CCA059FC4}" type="datetimeFigureOut">
               <a:rPr lang="en-US" smtClean="0"/>
-              <a:t>4/5/2026</a:t>
+              <a:t>4/6/2026</a:t>
             </a:fld>
             <a:endParaRPr lang="en-US"/>
           </a:p>
@@ -17451,7 +17451,7 @@
           <a:p>
             <a:fld id="{5BCAD085-E8A6-8845-BD4E-CB4CCA059FC4}" type="datetimeFigureOut">
               <a:rPr lang="en-US" smtClean="0"/>
-              <a:t>4/5/2026</a:t>
+              <a:t>4/6/2026</a:t>
             </a:fld>
             <a:endParaRPr lang="en-US"/>
           </a:p>
@@ -17546,7 +17546,7 @@
           <a:p>
             <a:fld id="{5BCAD085-E8A6-8845-BD4E-CB4CCA059FC4}" type="datetimeFigureOut">
               <a:rPr lang="en-US" smtClean="0"/>
-              <a:t>4/5/2026</a:t>
+              <a:t>4/6/2026</a:t>
             </a:fld>
             <a:endParaRPr lang="en-US"/>
           </a:p>
@@ -17838,7 +17838,7 @@
           <a:p>
             <a:fld id="{5BCAD085-E8A6-8845-BD4E-CB4CCA059FC4}" type="datetimeFigureOut">
               <a:rPr lang="en-US" smtClean="0"/>
-              <a:t>4/5/2026</a:t>
+              <a:t>4/6/2026</a:t>
             </a:fld>
             <a:endParaRPr lang="en-US"/>
           </a:p>
@@ -18118,7 +18118,7 @@
           <a:p>
             <a:fld id="{5BCAD085-E8A6-8845-BD4E-CB4CCA059FC4}" type="datetimeFigureOut">
               <a:rPr lang="en-US" smtClean="0"/>
-              <a:t>4/5/2026</a:t>
+              <a:t>4/6/2026</a:t>
             </a:fld>
             <a:endParaRPr lang="en-US"/>
           </a:p>
@@ -18368,7 +18368,7 @@
           <a:p>
             <a:fld id="{5BCAD085-E8A6-8845-BD4E-CB4CCA059FC4}" type="datetimeFigureOut">
               <a:rPr lang="en-US" smtClean="0"/>
-              <a:t>4/5/2026</a:t>
+              <a:t>4/6/2026</a:t>
             </a:fld>
             <a:endParaRPr lang="en-US"/>
           </a:p>
@@ -28687,7 +28687,8 @@
           <a:lstStyle/>
           <a:p>
             <a:r>
-              <a:t>Module 13 — Microsoft Fabric</a:t>
+              <a:rPr dirty="0"/>
+              <a:t>Microsoft Fabric</a:t>
             </a:r>
           </a:p>
         </p:txBody>
@@ -29719,7 +29720,8 @@
           <a:lstStyle/>
           <a:p>
             <a:r>
-              <a:t>Module 11 — Optimization &amp; Lifecycle</a:t>
+              <a:rPr dirty="0"/>
+              <a:t>Optimization &amp; Lifecycle</a:t>
             </a:r>
           </a:p>
         </p:txBody>
